--- a/viewers/pptx/e2e/fixtures/morph-shape-swap.pptx
+++ b/viewers/pptx/e2e/fixtures/morph-shape-swap.pptx
@@ -544,13 +544,18 @@
   <p:clrMapOvr>
     <a:masterClrMapping/>
   </p:clrMapOvr>
-  <p:transition dur="1000">
-    <p:extLst>
-      <p:ext uri="{C7C9D14B-FE2A-4D35-B620-AB07D5B017F4}">
-        <p159:morph xmlns:p159="http://schemas.microsoft.com/office/powerpoint/2015/09/main"/>
-      </p:ext>
-    </p:extLst>
-  </p:transition>
+  <mc:AlternateContent xmlns:mc="http://schemas.openxmlformats.org/markup-compatibility/2006">
+    <mc:Choice xmlns:p159="http://schemas.microsoft.com/office/powerpoint/2015/09/main" xmlns:p14="http://schemas.microsoft.com/office/powerpoint/2010/main" Requires="p159">
+      <p:transition p14:dur="1000">
+        <p159:morph xmlns:p159="http://schemas.microsoft.com/office/powerpoint/2015/09/main" option="byObject"/>
+      </p:transition>
+    </mc:Choice>
+    <mc:Fallback>
+      <p:transition>
+        <p:fade/>
+      </p:transition>
+    </mc:Fallback>
+  </mc:AlternateContent>
 </p:sld>
 </file>
 

--- a/viewers/pptx/e2e/fixtures/morph-shape-swap.pptx
+++ b/viewers/pptx/e2e/fixtures/morph-shape-swap.pptx
@@ -363,7 +363,7 @@
           <a:spcPct val="20000"/>
         </a:spcBef>
         <a:buFont typeface="Arial" panose="020B0604020202020204" pitchFamily="34" charset="0"/>
-        <a:buChar char="&amp;#x2022;"/>
+        <a:buChar char="•"/>
         <a:defRPr sz="3200" kern="1200">
           <a:solidFill>
             <a:schemeClr val="tx1"/>

--- a/viewers/pptx/e2e/fixtures/morph-shape-swap.pptx
+++ b/viewers/pptx/e2e/fixtures/morph-shape-swap.pptx
@@ -402,7 +402,7 @@
       </p:grpSpPr>
       <p:sp>
         <p:nvSpPr>
-          <p:cNvPr id="3" name="Rectangle 1"/>
+          <p:cNvPr id="2" name="Rectangle 1"/>
           <p:cNvSpPr txBox="0"/>
           <p:nvPr/>
         </p:nvSpPr>
@@ -431,7 +431,7 @@
       </p:sp>
       <p:sp>
         <p:nvSpPr>
-          <p:cNvPr id="2" name="TextBox 2"/>
+          <p:cNvPr id="3" name="TextBox 2"/>
           <p:cNvSpPr txBox="1"/>
           <p:nvPr/>
         </p:nvSpPr>
@@ -484,7 +484,7 @@
       </p:grpSpPr>
       <p:sp>
         <p:nvSpPr>
-          <p:cNvPr id="3" name="Rectangle 3"/>
+          <p:cNvPr id="2" name="Rectangle 3"/>
           <p:cNvSpPr txBox="0"/>
           <p:nvPr/>
         </p:nvSpPr>
@@ -513,7 +513,7 @@
       </p:sp>
       <p:sp>
         <p:nvSpPr>
-          <p:cNvPr id="4" name="TextBox 4"/>
+          <p:cNvPr id="3" name="TextBox 4"/>
           <p:cNvSpPr txBox="1"/>
           <p:nvPr/>
         </p:nvSpPr>

--- a/viewers/pptx/e2e/fixtures/morph-shape-swap.pptx
+++ b/viewers/pptx/e2e/fixtures/morph-shape-swap.pptx
@@ -448,12 +448,10 @@
           <a:bodyPr wrap="square"/>
           <a:lstStyle/>
           <a:p>
-            <a:pPr/>
             <a:r>
-              <a:rPr lang="en-US" dirty="0" sz="2100" b="1"/>
+              <a:rPr lang="en-US" sz="2100" b="1" dirty="0"/>
               <a:t>Morph Start</a:t>
             </a:r>
-            <a:endParaRPr lang="en-US"/>
           </a:p>
         </p:txBody>
       </p:sp>
@@ -530,12 +528,10 @@
           <a:bodyPr wrap="square"/>
           <a:lstStyle/>
           <a:p>
-            <a:pPr/>
             <a:r>
-              <a:rPr lang="en-US" dirty="0" sz="2100" b="1"/>
+              <a:rPr lang="en-US" sz="2100" b="1" dirty="0"/>
               <a:t>Morph End</a:t>
             </a:r>
-            <a:endParaRPr lang="en-US"/>
           </a:p>
         </p:txBody>
       </p:sp>
